--- a/examples/pm8_delete_csp/delete_csp_merged.pptx
+++ b/examples/pm8_delete_csp/delete_csp_merged.pptx
@@ -808,7 +808,7 @@
     </p:spTree>
     <p:extLst>
       <p:ext uri="{BB962C8B-B14F-4D97-AF65-F5344CB8AC3E}">
-        <p14:creationId xmlns:p14="http://schemas.microsoft.com/office/powerpoint/2010/main" val="202254989"/>
+        <p14:creationId xmlns:p14="http://schemas.microsoft.com/office/powerpoint/2010/main" val="1442895549"/>
       </p:ext>
     </p:extLst>
   </p:cSld>
@@ -1050,7 +1050,7 @@
     </p:spTree>
     <p:extLst>
       <p:ext uri="{BB962C8B-B14F-4D97-AF65-F5344CB8AC3E}">
-        <p14:creationId xmlns:p14="http://schemas.microsoft.com/office/powerpoint/2010/main" val="1704155641"/>
+        <p14:creationId xmlns:p14="http://schemas.microsoft.com/office/powerpoint/2010/main" val="2343975570"/>
       </p:ext>
     </p:extLst>
   </p:cSld>
@@ -1158,7 +1158,7 @@
     </p:spTree>
     <p:extLst>
       <p:ext uri="{BB962C8B-B14F-4D97-AF65-F5344CB8AC3E}">
-        <p14:creationId xmlns:p14="http://schemas.microsoft.com/office/powerpoint/2010/main" val="2877394941"/>
+        <p14:creationId xmlns:p14="http://schemas.microsoft.com/office/powerpoint/2010/main" val="2903968548"/>
       </p:ext>
     </p:extLst>
   </p:cSld>
@@ -1266,7 +1266,7 @@
     </p:spTree>
     <p:extLst>
       <p:ext uri="{BB962C8B-B14F-4D97-AF65-F5344CB8AC3E}">
-        <p14:creationId xmlns:p14="http://schemas.microsoft.com/office/powerpoint/2010/main" val="1241625962"/>
+        <p14:creationId xmlns:p14="http://schemas.microsoft.com/office/powerpoint/2010/main" val="2779983953"/>
       </p:ext>
     </p:extLst>
   </p:cSld>
@@ -1500,7 +1500,7 @@
     </p:spTree>
     <p:extLst>
       <p:ext uri="{BB962C8B-B14F-4D97-AF65-F5344CB8AC3E}">
-        <p14:creationId xmlns:p14="http://schemas.microsoft.com/office/powerpoint/2010/main" val="1295991876"/>
+        <p14:creationId xmlns:p14="http://schemas.microsoft.com/office/powerpoint/2010/main" val="2064989958"/>
       </p:ext>
     </p:extLst>
   </p:cSld>
@@ -5125,7 +5125,7 @@
     </p:spTree>
     <p:extLst>
       <p:ext uri="{BB962C8B-B14F-4D97-AF65-F5344CB8AC3E}">
-        <p14:creationId xmlns:p14="http://schemas.microsoft.com/office/powerpoint/2010/main" val="2009107384"/>
+        <p14:creationId xmlns:p14="http://schemas.microsoft.com/office/powerpoint/2010/main" val="1082939315"/>
       </p:ext>
     </p:extLst>
   </p:cSld>
@@ -5883,7 +5883,7 @@
     </p:spTree>
     <p:extLst>
       <p:ext uri="{BB962C8B-B14F-4D97-AF65-F5344CB8AC3E}">
-        <p14:creationId xmlns:p14="http://schemas.microsoft.com/office/powerpoint/2010/main" val="3887947737"/>
+        <p14:creationId xmlns:p14="http://schemas.microsoft.com/office/powerpoint/2010/main" val="3564899438"/>
       </p:ext>
     </p:extLst>
   </p:cSld>
@@ -6876,7 +6876,7 @@
     </p:spTree>
     <p:extLst>
       <p:ext uri="{BB962C8B-B14F-4D97-AF65-F5344CB8AC3E}">
-        <p14:creationId xmlns:p14="http://schemas.microsoft.com/office/powerpoint/2010/main" val="296468235"/>
+        <p14:creationId xmlns:p14="http://schemas.microsoft.com/office/powerpoint/2010/main" val="1778241187"/>
       </p:ext>
     </p:extLst>
   </p:cSld>
@@ -7476,7 +7476,7 @@
     </p:spTree>
     <p:extLst>
       <p:ext uri="{BB962C8B-B14F-4D97-AF65-F5344CB8AC3E}">
-        <p14:creationId xmlns:p14="http://schemas.microsoft.com/office/powerpoint/2010/main" val="3490528843"/>
+        <p14:creationId xmlns:p14="http://schemas.microsoft.com/office/powerpoint/2010/main" val="3639981834"/>
       </p:ext>
     </p:extLst>
   </p:cSld>
@@ -8497,7 +8497,7 @@
     </p:spTree>
     <p:extLst>
       <p:ext uri="{BB962C8B-B14F-4D97-AF65-F5344CB8AC3E}">
-        <p14:creationId xmlns:p14="http://schemas.microsoft.com/office/powerpoint/2010/main" val="3077901647"/>
+        <p14:creationId xmlns:p14="http://schemas.microsoft.com/office/powerpoint/2010/main" val="2065916337"/>
       </p:ext>
     </p:extLst>
   </p:cSld>

--- a/examples/pm8_delete_csp/delete_csp_merged.pptx
+++ b/examples/pm8_delete_csp/delete_csp_merged.pptx
@@ -242,7 +242,7 @@
           <a:p>
             <a:fld id="{294670BC-B8C6-44A7-84E1-23632D8FD86F}" type="datetimeFigureOut">
               <a:rPr kumimoji="1" lang="ja-JP" altLang="en-US" smtClean="0"/>
-              <a:t>2026/6/4</a:t>
+              <a:t>2026/6/6</a:t>
             </a:fld>
             <a:endParaRPr kumimoji="1" lang="ja-JP" altLang="en-US"/>
           </a:p>
@@ -808,7 +808,7 @@
     </p:spTree>
     <p:extLst>
       <p:ext uri="{BB962C8B-B14F-4D97-AF65-F5344CB8AC3E}">
-        <p14:creationId xmlns:p14="http://schemas.microsoft.com/office/powerpoint/2010/main" val="1442895549"/>
+        <p14:creationId xmlns:p14="http://schemas.microsoft.com/office/powerpoint/2010/main" val="2210177144"/>
       </p:ext>
     </p:extLst>
   </p:cSld>
@@ -1050,7 +1050,7 @@
     </p:spTree>
     <p:extLst>
       <p:ext uri="{BB962C8B-B14F-4D97-AF65-F5344CB8AC3E}">
-        <p14:creationId xmlns:p14="http://schemas.microsoft.com/office/powerpoint/2010/main" val="2343975570"/>
+        <p14:creationId xmlns:p14="http://schemas.microsoft.com/office/powerpoint/2010/main" val="1010012761"/>
       </p:ext>
     </p:extLst>
   </p:cSld>
@@ -1158,7 +1158,7 @@
     </p:spTree>
     <p:extLst>
       <p:ext uri="{BB962C8B-B14F-4D97-AF65-F5344CB8AC3E}">
-        <p14:creationId xmlns:p14="http://schemas.microsoft.com/office/powerpoint/2010/main" val="2903968548"/>
+        <p14:creationId xmlns:p14="http://schemas.microsoft.com/office/powerpoint/2010/main" val="4243953444"/>
       </p:ext>
     </p:extLst>
   </p:cSld>
@@ -1266,7 +1266,7 @@
     </p:spTree>
     <p:extLst>
       <p:ext uri="{BB962C8B-B14F-4D97-AF65-F5344CB8AC3E}">
-        <p14:creationId xmlns:p14="http://schemas.microsoft.com/office/powerpoint/2010/main" val="2779983953"/>
+        <p14:creationId xmlns:p14="http://schemas.microsoft.com/office/powerpoint/2010/main" val="3804711143"/>
       </p:ext>
     </p:extLst>
   </p:cSld>
@@ -1500,7 +1500,7 @@
     </p:spTree>
     <p:extLst>
       <p:ext uri="{BB962C8B-B14F-4D97-AF65-F5344CB8AC3E}">
-        <p14:creationId xmlns:p14="http://schemas.microsoft.com/office/powerpoint/2010/main" val="2064989958"/>
+        <p14:creationId xmlns:p14="http://schemas.microsoft.com/office/powerpoint/2010/main" val="4207358920"/>
       </p:ext>
     </p:extLst>
   </p:cSld>
@@ -5125,7 +5125,7 @@
     </p:spTree>
     <p:extLst>
       <p:ext uri="{BB962C8B-B14F-4D97-AF65-F5344CB8AC3E}">
-        <p14:creationId xmlns:p14="http://schemas.microsoft.com/office/powerpoint/2010/main" val="1082939315"/>
+        <p14:creationId xmlns:p14="http://schemas.microsoft.com/office/powerpoint/2010/main" val="3191574928"/>
       </p:ext>
     </p:extLst>
   </p:cSld>
@@ -5883,7 +5883,7 @@
     </p:spTree>
     <p:extLst>
       <p:ext uri="{BB962C8B-B14F-4D97-AF65-F5344CB8AC3E}">
-        <p14:creationId xmlns:p14="http://schemas.microsoft.com/office/powerpoint/2010/main" val="3564899438"/>
+        <p14:creationId xmlns:p14="http://schemas.microsoft.com/office/powerpoint/2010/main" val="2928582908"/>
       </p:ext>
     </p:extLst>
   </p:cSld>
@@ -6876,7 +6876,7 @@
     </p:spTree>
     <p:extLst>
       <p:ext uri="{BB962C8B-B14F-4D97-AF65-F5344CB8AC3E}">
-        <p14:creationId xmlns:p14="http://schemas.microsoft.com/office/powerpoint/2010/main" val="1778241187"/>
+        <p14:creationId xmlns:p14="http://schemas.microsoft.com/office/powerpoint/2010/main" val="867909025"/>
       </p:ext>
     </p:extLst>
   </p:cSld>
@@ -7476,7 +7476,7 @@
     </p:spTree>
     <p:extLst>
       <p:ext uri="{BB962C8B-B14F-4D97-AF65-F5344CB8AC3E}">
-        <p14:creationId xmlns:p14="http://schemas.microsoft.com/office/powerpoint/2010/main" val="3639981834"/>
+        <p14:creationId xmlns:p14="http://schemas.microsoft.com/office/powerpoint/2010/main" val="567448579"/>
       </p:ext>
     </p:extLst>
   </p:cSld>
@@ -8497,7 +8497,7 @@
     </p:spTree>
     <p:extLst>
       <p:ext uri="{BB962C8B-B14F-4D97-AF65-F5344CB8AC3E}">
-        <p14:creationId xmlns:p14="http://schemas.microsoft.com/office/powerpoint/2010/main" val="2065916337"/>
+        <p14:creationId xmlns:p14="http://schemas.microsoft.com/office/powerpoint/2010/main" val="2911519622"/>
       </p:ext>
     </p:extLst>
   </p:cSld>
